--- a/organiser-education-productivity.pptx
+++ b/organiser-education-productivity.pptx
@@ -6514,7 +6514,7 @@
               <a:rPr>
                 <a:hlinkClick r:id="rId2"/>
               </a:rPr>
-              <a:t>https://www.youtube-nocookie.com/watch?v=00npeUY_1Vg</a:t>
+              <a:t>https://www.youtube.com/watch?v=00npeUY_1Vg</a:t>
             </a:r>
           </a:p>
         </p:txBody>
